--- a/fruit_grading_summary.pptx
+++ b/fruit_grading_summary.pptx
@@ -7550,7 +7550,7 @@
         </p:nvSpPr>
         <p:spPr>
           <a:xfrm>
-            <a:off x="548640" y="1554480"/>
+            <a:off x="548640" y="1508760"/>
             <a:ext cx="3474720" cy="365760"/>
           </a:xfrm>
           <a:prstGeom prst="rect">
@@ -7566,7 +7566,7 @@
           <a:p>
             <a:pPr algn="l"/>
             <a:r>
-              <a:rPr sz="1200" b="1">
+              <a:rPr sz="1100" b="1">
                 <a:solidFill>
                   <a:srgbClr val="E34A2F"/>
                 </a:solidFill>
@@ -7585,8 +7585,8 @@
         </p:nvSpPr>
         <p:spPr>
           <a:xfrm>
-            <a:off x="4023360" y="1554480"/>
-            <a:ext cx="7772400" cy="594360"/>
+            <a:off x="4023360" y="1508760"/>
+            <a:ext cx="7772400" cy="548640"/>
           </a:xfrm>
           <a:prstGeom prst="rect">
             <a:avLst/>
@@ -7620,7 +7620,7 @@
         </p:nvSpPr>
         <p:spPr>
           <a:xfrm>
-            <a:off x="548640" y="2130552"/>
+            <a:off x="548640" y="2039112"/>
             <a:ext cx="3474720" cy="365760"/>
           </a:xfrm>
           <a:prstGeom prst="rect">
@@ -7636,7 +7636,7 @@
           <a:p>
             <a:pPr algn="l"/>
             <a:r>
-              <a:rPr sz="1200" b="1">
+              <a:rPr sz="1100" b="1">
                 <a:solidFill>
                   <a:srgbClr val="E34A2F"/>
                 </a:solidFill>
@@ -7655,8 +7655,8 @@
         </p:nvSpPr>
         <p:spPr>
           <a:xfrm>
-            <a:off x="4023360" y="2130552"/>
-            <a:ext cx="7772400" cy="594360"/>
+            <a:off x="4023360" y="2039112"/>
+            <a:ext cx="7772400" cy="548640"/>
           </a:xfrm>
           <a:prstGeom prst="rect">
             <a:avLst/>
@@ -7690,7 +7690,7 @@
         </p:nvSpPr>
         <p:spPr>
           <a:xfrm>
-            <a:off x="548640" y="2706624"/>
+            <a:off x="548640" y="2569464"/>
             <a:ext cx="3474720" cy="365760"/>
           </a:xfrm>
           <a:prstGeom prst="rect">
@@ -7706,7 +7706,7 @@
           <a:p>
             <a:pPr algn="l"/>
             <a:r>
-              <a:rPr sz="1200" b="1">
+              <a:rPr sz="1100" b="1">
                 <a:solidFill>
                   <a:srgbClr val="E34A2F"/>
                 </a:solidFill>
@@ -7725,8 +7725,8 @@
         </p:nvSpPr>
         <p:spPr>
           <a:xfrm>
-            <a:off x="4023360" y="2706624"/>
-            <a:ext cx="7772400" cy="594360"/>
+            <a:off x="4023360" y="2569464"/>
+            <a:ext cx="7772400" cy="548640"/>
           </a:xfrm>
           <a:prstGeom prst="rect">
             <a:avLst/>
@@ -7760,7 +7760,7 @@
         </p:nvSpPr>
         <p:spPr>
           <a:xfrm>
-            <a:off x="548640" y="3282696"/>
+            <a:off x="548640" y="3099816"/>
             <a:ext cx="3474720" cy="365760"/>
           </a:xfrm>
           <a:prstGeom prst="rect">
@@ -7776,7 +7776,7 @@
           <a:p>
             <a:pPr algn="l"/>
             <a:r>
-              <a:rPr sz="1200" b="1">
+              <a:rPr sz="1100" b="1">
                 <a:solidFill>
                   <a:srgbClr val="E34A2F"/>
                 </a:solidFill>
@@ -7795,8 +7795,8 @@
         </p:nvSpPr>
         <p:spPr>
           <a:xfrm>
-            <a:off x="4023360" y="3282696"/>
-            <a:ext cx="7772400" cy="594360"/>
+            <a:off x="4023360" y="3099816"/>
+            <a:ext cx="7772400" cy="548640"/>
           </a:xfrm>
           <a:prstGeom prst="rect">
             <a:avLst/>
@@ -7830,7 +7830,7 @@
         </p:nvSpPr>
         <p:spPr>
           <a:xfrm>
-            <a:off x="548640" y="3858768"/>
+            <a:off x="548640" y="3630168"/>
             <a:ext cx="3474720" cy="365760"/>
           </a:xfrm>
           <a:prstGeom prst="rect">
@@ -7846,7 +7846,7 @@
           <a:p>
             <a:pPr algn="l"/>
             <a:r>
-              <a:rPr sz="1200" b="1">
+              <a:rPr sz="1100" b="1">
                 <a:solidFill>
                   <a:srgbClr val="E34A2F"/>
                 </a:solidFill>
@@ -7865,8 +7865,8 @@
         </p:nvSpPr>
         <p:spPr>
           <a:xfrm>
-            <a:off x="4023360" y="3858768"/>
-            <a:ext cx="7772400" cy="594360"/>
+            <a:off x="4023360" y="3630168"/>
+            <a:ext cx="7772400" cy="548640"/>
           </a:xfrm>
           <a:prstGeom prst="rect">
             <a:avLst/>
@@ -7900,7 +7900,7 @@
         </p:nvSpPr>
         <p:spPr>
           <a:xfrm>
-            <a:off x="548640" y="4434840"/>
+            <a:off x="548640" y="4160520"/>
             <a:ext cx="3474720" cy="365760"/>
           </a:xfrm>
           <a:prstGeom prst="rect">
@@ -7916,7 +7916,7 @@
           <a:p>
             <a:pPr algn="l"/>
             <a:r>
-              <a:rPr sz="1200" b="1">
+              <a:rPr sz="1100" b="1">
                 <a:solidFill>
                   <a:srgbClr val="E34A2F"/>
                 </a:solidFill>
@@ -7935,8 +7935,8 @@
         </p:nvSpPr>
         <p:spPr>
           <a:xfrm>
-            <a:off x="4023360" y="4434840"/>
-            <a:ext cx="7772400" cy="594360"/>
+            <a:off x="4023360" y="4160520"/>
+            <a:ext cx="7772400" cy="548640"/>
           </a:xfrm>
           <a:prstGeom prst="rect">
             <a:avLst/>
@@ -7970,7 +7970,7 @@
         </p:nvSpPr>
         <p:spPr>
           <a:xfrm>
-            <a:off x="548640" y="5010912"/>
+            <a:off x="548640" y="4690872"/>
             <a:ext cx="3474720" cy="365760"/>
           </a:xfrm>
           <a:prstGeom prst="rect">
@@ -7986,7 +7986,7 @@
           <a:p>
             <a:pPr algn="l"/>
             <a:r>
-              <a:rPr sz="1200" b="1">
+              <a:rPr sz="1100" b="1">
                 <a:solidFill>
                   <a:srgbClr val="E34A2F"/>
                 </a:solidFill>
@@ -8005,8 +8005,8 @@
         </p:nvSpPr>
         <p:spPr>
           <a:xfrm>
-            <a:off x="4023360" y="5010912"/>
-            <a:ext cx="7772400" cy="594360"/>
+            <a:off x="4023360" y="4690872"/>
+            <a:ext cx="7772400" cy="548640"/>
           </a:xfrm>
           <a:prstGeom prst="rect">
             <a:avLst/>
@@ -8040,7 +8040,7 @@
         </p:nvSpPr>
         <p:spPr>
           <a:xfrm>
-            <a:off x="548640" y="5586984"/>
+            <a:off x="548640" y="5221224"/>
             <a:ext cx="3474720" cy="365760"/>
           </a:xfrm>
           <a:prstGeom prst="rect">
@@ -8056,7 +8056,7 @@
           <a:p>
             <a:pPr algn="l"/>
             <a:r>
-              <a:rPr sz="1200" b="1">
+              <a:rPr sz="1100" b="1">
                 <a:solidFill>
                   <a:srgbClr val="E34A2F"/>
                 </a:solidFill>
@@ -8075,8 +8075,8 @@
         </p:nvSpPr>
         <p:spPr>
           <a:xfrm>
-            <a:off x="4023360" y="5586984"/>
-            <a:ext cx="7772400" cy="594360"/>
+            <a:off x="4023360" y="5221224"/>
+            <a:ext cx="7772400" cy="548640"/>
           </a:xfrm>
           <a:prstGeom prst="rect">
             <a:avLst/>
@@ -8105,6 +8105,76 @@
       <p:sp>
         <p:nvSpPr>
           <p:cNvPr id="22" name="TextBox 21"/>
+          <p:cNvSpPr txBox="1"/>
+          <p:nvPr/>
+        </p:nvSpPr>
+        <p:spPr>
+          <a:xfrm>
+            <a:off x="548640" y="5751576"/>
+            <a:ext cx="3474720" cy="365760"/>
+          </a:xfrm>
+          <a:prstGeom prst="rect">
+            <a:avLst/>
+          </a:prstGeom>
+          <a:noFill/>
+        </p:spPr>
+        <p:txBody>
+          <a:bodyPr wrap="square" anchor="t" lIns="45720" rIns="45720" tIns="0" bIns="0">
+            <a:spAutoFit/>
+          </a:bodyPr>
+          <a:lstStyle/>
+          <a:p>
+            <a:pPr algn="l"/>
+            <a:r>
+              <a:rPr sz="1100" b="1">
+                <a:solidFill>
+                  <a:srgbClr val="E34A2F"/>
+                </a:solidFill>
+                <a:latin typeface="Apple SD Gothic Neo"/>
+              </a:rPr>
+              <a:t>9. Multi-view Attention Fusion</a:t>
+            </a:r>
+          </a:p>
+        </p:txBody>
+      </p:sp>
+      <p:sp>
+        <p:nvSpPr>
+          <p:cNvPr id="23" name="TextBox 22"/>
+          <p:cNvSpPr txBox="1"/>
+          <p:nvPr/>
+        </p:nvSpPr>
+        <p:spPr>
+          <a:xfrm>
+            <a:off x="4023360" y="5751576"/>
+            <a:ext cx="7772400" cy="548640"/>
+          </a:xfrm>
+          <a:prstGeom prst="rect">
+            <a:avLst/>
+          </a:prstGeom>
+          <a:noFill/>
+        </p:spPr>
+        <p:txBody>
+          <a:bodyPr wrap="square" anchor="t" lIns="45720" rIns="45720" tIns="0" bIns="0">
+            <a:spAutoFit/>
+          </a:bodyPr>
+          <a:lstStyle/>
+          <a:p>
+            <a:pPr algn="l"/>
+            <a:r>
+              <a:rPr sz="1000" b="0">
+                <a:solidFill>
+                  <a:srgbClr val="1A1A2E"/>
+                </a:solidFill>
+                <a:latin typeface="Apple SD Gothic Neo"/>
+              </a:rPr>
+              <a:t>concat 대신 learnable weighted-avg (softmax α_t1,t2,b1). 파라미터 3개 추가로 뷰별 기여도 명시 학습 + 해석성 확보. Self-attention은 데이터 규모상 risky</a:t>
+            </a:r>
+          </a:p>
+        </p:txBody>
+      </p:sp>
+      <p:sp>
+        <p:nvSpPr>
+          <p:cNvPr id="24" name="TextBox 23"/>
           <p:cNvSpPr txBox="1"/>
           <p:nvPr/>
         </p:nvSpPr>
@@ -10803,7 +10873,7 @@
                 </a:solidFill>
                 <a:latin typeface="Apple SD Gothic Neo"/>
               </a:rPr>
-              <a:t>현재 워크플로우 (수작업)</a:t>
+              <a:t>현재 워크플로우 (각 장비 개별 측정)</a:t>
             </a:r>
           </a:p>
         </p:txBody>
@@ -10842,7 +10912,7 @@
                 </a:solidFill>
                 <a:latin typeface="Apple SD Gothic Neo"/>
               </a:rPr>
-              <a:t>• 작업자가 개별 과일을 육안/캘리퍼스로 측정</a:t>
+              <a:t>• 전수 측정: 전자저울(무게) + 캘리퍼스(치수) + 비파괴 당도계(brix)</a:t>
             </a:r>
           </a:p>
           <a:p>
@@ -10858,7 +10928,7 @@
                 </a:solidFill>
                 <a:latin typeface="Apple SD Gothic Neo"/>
               </a:rPr>
-              <a:t>• 등급 판정 주관적, 작업자 간 편차</a:t>
+              <a:t>• 과일 1개당 ≥3 개 장비 순차 거치 → 처리 속도 병목</a:t>
             </a:r>
           </a:p>
           <a:p>
@@ -10874,7 +10944,7 @@
                 </a:solidFill>
                 <a:latin typeface="Apple SD Gothic Neo"/>
               </a:rPr>
-              <a:t>• 대량 처리 시 속도·피로도 제약</a:t>
+              <a:t>• 작업자 반복 조작 필요, 대량 처리 시 피로·오차 누적</a:t>
             </a:r>
           </a:p>
           <a:p>
@@ -10890,7 +10960,7 @@
                 </a:solidFill>
                 <a:latin typeface="Apple SD Gothic Neo"/>
               </a:rPr>
-              <a:t>• 당도(brix)는 별도 샘플링으로 파괴적 측정</a:t>
+              <a:t>• 선별기 카메라는 이미 존재 — 측정에 활용되지 못함</a:t>
             </a:r>
           </a:p>
         </p:txBody>
@@ -10925,7 +10995,7 @@
                 </a:solidFill>
                 <a:latin typeface="Apple SD Gothic Neo"/>
               </a:rPr>
-              <a:t>목표: 자동화 파이프라인</a:t>
+              <a:t>목표: 카메라 단일 파이프라인으로 통합</a:t>
             </a:r>
           </a:p>
         </p:txBody>
@@ -10964,7 +11034,7 @@
                 </a:solidFill>
                 <a:latin typeface="Apple SD Gothic Neo"/>
               </a:rPr>
-              <a:t>• 3뷰(top1/top2/bottom1) 이미지 → 측정값 회귀</a:t>
+              <a:t>• 3뷰(top1/top2/bottom1) 이미지 → 측정값 직접 회귀</a:t>
             </a:r>
           </a:p>
           <a:p>
@@ -10980,7 +11050,7 @@
                 </a:solidFill>
                 <a:latin typeface="Apple SD Gothic Neo"/>
               </a:rPr>
-              <a:t>• weight(g) / height·max_w·min_w(mm) / brix(°Bx) 예측</a:t>
+              <a:t>• weight(g) / height·max_w·min_w(mm) / brix(°Bx) 동시 예측</a:t>
             </a:r>
           </a:p>
           <a:p>
@@ -10996,7 +11066,7 @@
                 </a:solidFill>
                 <a:latin typeface="Apple SD Gothic Neo"/>
               </a:rPr>
-              <a:t>• 실시간 등급화 (tertile 기반 3-grade)</a:t>
+              <a:t>• 별도 저울·캘리퍼스·당도계 없이 선별기 흐름 중 자동화</a:t>
             </a:r>
           </a:p>
           <a:p>
@@ -11047,7 +11117,7 @@
                 </a:solidFill>
                 <a:latin typeface="Apple SD Gothic Neo"/>
               </a:rPr>
-              <a:t>Why this matters: 선별 일관성·속도·비접촉 brix 측정 → 농가 상품성↑, 작업자 피로↓, 외산 장비 대체</a:t>
+              <a:t>Why this matters: 3 장비 통합으로 처리량↑·인력↓, 이미지 기반 등급화로 선별 일관성 확보, 기존 선별기 하드웨어 재활용</a:t>
             </a:r>
           </a:p>
         </p:txBody>
